--- a/classes/parte-10-seguridad-en-la-nube-y-contenedores/221-fundamentos-de-seguridad-en-la-nube-y-responsabilidad-compartida/clase-221-presentacion.pptx
+++ b/classes/parte-10-seguridad-en-la-nube-y-contenedores/221-fundamentos-de-seguridad-en-la-nube-y-responsabilidad-compartida/clase-221-presentacion.pptx
@@ -17,6 +17,10 @@
     <p:sldId id="265" r:id="rId16"/>
     <p:sldId id="266" r:id="rId17"/>
     <p:sldId id="267" r:id="rId18"/>
+    <p:sldId id="268" r:id="rId19"/>
+    <p:sldId id="269" r:id="rId20"/>
+    <p:sldId id="270" r:id="rId21"/>
+    <p:sldId id="271" r:id="rId22"/>
   </p:sldIdLst>
   <p:sldSz cx="9144000" cy="6858000" type="screen4x3"/>
   <p:notesSz cx="6858000" cy="9144000"/>
@@ -3198,7 +3202,7 @@
                   <a:srgbClr val="0B3D2E"/>
                 </a:solidFill>
               </a:rPr>
-              <a:t>⚠️ Errores comunes</a:t>
+              <a:t>🧪 Laboratorio guiado (ejercicio aplicado)</a:t>
             </a:r>
           </a:p>
         </p:txBody>
@@ -3236,67 +3240,97 @@
                   <a:srgbClr val="22282E"/>
                 </a:solidFill>
               </a:rPr>
-              <a:t>•  "El proveedor ya me protege, no necesito hacer nada" — Malentiende el modelo; la config y los datos siempre son del cliente. Aplica controles propios.</a:t>
-            </a:r>
-          </a:p>
-          <a:p>
-            <a:pPr>
-              <a:spcAft>
-                <a:spcPts val="600"/>
-              </a:spcAft>
-            </a:pPr>
-            <a:r>
-              <a:rPr sz="1500">
-                <a:solidFill>
-                  <a:srgbClr val="22282E"/>
-                </a:solidFill>
-              </a:rPr>
-              <a:t>•  Bucket o blob accesible públicamente sin querer — ACL/política heredada o pública por defecto en versiones antiguas; activa block public access.</a:t>
-            </a:r>
-          </a:p>
-          <a:p>
-            <a:pPr>
-              <a:spcAft>
-                <a:spcPts val="600"/>
-              </a:spcAft>
-            </a:pPr>
-            <a:r>
-              <a:rPr sz="1500">
-                <a:solidFill>
-                  <a:srgbClr val="22282E"/>
-                </a:solidFill>
-              </a:rPr>
-              <a:t>•  Uso diario de la cuenta raíz — Rompe el privilegio mínimo; crea usuarios/roles y guarda la raíz solo para tareas críticas con MFA.</a:t>
-            </a:r>
-          </a:p>
-          <a:p>
-            <a:pPr>
-              <a:spcAft>
-                <a:spcPts val="600"/>
-              </a:spcAft>
-            </a:pPr>
-            <a:r>
-              <a:rPr sz="1500">
-                <a:solidFill>
-                  <a:srgbClr val="22282E"/>
-                </a:solidFill>
-              </a:rPr>
-              <a:t>•  Datos en región equivocada — Se ignoró soberanía/latencia; define región por diseño y bloquea otras con SCP/policies.</a:t>
-            </a:r>
-          </a:p>
-          <a:p>
-            <a:pPr>
-              <a:spcAft>
-                <a:spcPts val="600"/>
-              </a:spcAft>
-            </a:pPr>
-            <a:r>
-              <a:rPr sz="1500">
-                <a:solidFill>
-                  <a:srgbClr val="22282E"/>
-                </a:solidFill>
-              </a:rPr>
-              <a:t>•  "No sé qué recursos tengo" — Falta de inventario; habilita Config/Asset Inventory desde el día uno.</a:t>
+              <a:t>•  Este es un tema conceptual: el laboratorio es un análisis de arquitectura y una matriz de responsabilidad.</a:t>
+            </a:r>
+          </a:p>
+          <a:p>
+            <a:pPr>
+              <a:spcAft>
+                <a:spcPts val="600"/>
+              </a:spcAft>
+            </a:pPr>
+            <a:r>
+              <a:rPr sz="1500">
+                <a:solidFill>
+                  <a:srgbClr val="22282E"/>
+                </a:solidFill>
+              </a:rPr>
+              <a:t>•  Elige tres servicios reales, uno por modelo: por ejemplo EC2 (IaaS), AWS Lambda (PaaS/FaaS) y Amazon S3 (almacenamiento gestionado).</a:t>
+            </a:r>
+          </a:p>
+          <a:p>
+            <a:pPr>
+              <a:spcAft>
+                <a:spcPts val="600"/>
+              </a:spcAft>
+            </a:pPr>
+            <a:r>
+              <a:rPr sz="1500">
+                <a:solidFill>
+                  <a:srgbClr val="22282E"/>
+                </a:solidFill>
+              </a:rPr>
+              <a:t>•  Para cada uno, construye una tabla con las capas: hardware físico, red, hipervisor, SO, runtime, aplicación, datos, IAM/config. Marca en cada capa quién es responsable: Proveedor, Cliente o…</a:t>
+            </a:r>
+          </a:p>
+          <a:p>
+            <a:pPr>
+              <a:spcAft>
+                <a:spcPts val="600"/>
+              </a:spcAft>
+            </a:pPr>
+            <a:r>
+              <a:rPr sz="1500">
+                <a:solidFill>
+                  <a:srgbClr val="22282E"/>
+                </a:solidFill>
+              </a:rPr>
+              <a:t>•  Investiga en la documentación oficial cómo describe el proveedor la frontera de cada servicio y contrasta con tu tabla.</a:t>
+            </a:r>
+          </a:p>
+          <a:p>
+            <a:pPr>
+              <a:spcAft>
+                <a:spcPts val="600"/>
+              </a:spcAft>
+            </a:pPr>
+            <a:r>
+              <a:rPr sz="1500">
+                <a:solidFill>
+                  <a:srgbClr val="22282E"/>
+                </a:solidFill>
+              </a:rPr>
+              <a:t>•  Toma un incidente cloud documentado y separa hechos públicos, control afectado y tareas del proveedor, cliente o compartidas. No atribuyas causa si el informe público no la demuestra.</a:t>
+            </a:r>
+          </a:p>
+          <a:p>
+            <a:pPr>
+              <a:spcAft>
+                <a:spcPts val="600"/>
+              </a:spcAft>
+            </a:pPr>
+            <a:r>
+              <a:rPr sz="1500">
+                <a:solidFill>
+                  <a:srgbClr val="22282E"/>
+                </a:solidFill>
+              </a:rPr>
+              <a:t>•  Redacta un párrafo de "controles mínimos del cliente" para cada uno de los tres servicios.</a:t>
+            </a:r>
+          </a:p>
+          <a:p>
+            <a:pPr>
+              <a:spcAft>
+                <a:spcPts val="600"/>
+              </a:spcAft>
+            </a:pPr>
+            <a:r>
+              <a:rPr sz="1500">
+                <a:solidFill>
+                  <a:srgbClr val="22282E"/>
+                </a:solidFill>
+              </a:rPr>
+              <a:t>•  Repite el ejercicio de la capa IAM: describe por qué en la nube el perímetro es la identidad y no la red.</a:t>
             </a:r>
           </a:p>
         </p:txBody>
@@ -3347,7 +3381,7 @@
                   <a:srgbClr val="0B3D2E"/>
                 </a:solidFill>
               </a:rPr>
-              <a:t>❓ Preguntas frecuentes</a:t>
+              <a:t>✍️ Ejercicios</a:t>
             </a:r>
           </a:p>
         </p:txBody>
@@ -3385,82 +3419,82 @@
                   <a:srgbClr val="22282E"/>
                 </a:solidFill>
               </a:rPr>
-              <a:t>•  ❓ ¿La responsabilidad compartida es un contrato legal o solo técnico?</a:t>
-            </a:r>
-          </a:p>
-          <a:p>
-            <a:pPr>
-              <a:spcAft>
-                <a:spcPts val="600"/>
-              </a:spcAft>
-            </a:pPr>
-            <a:r>
-              <a:rPr sz="1500">
-                <a:solidFill>
-                  <a:srgbClr val="22282E"/>
-                </a:solidFill>
-              </a:rPr>
-              <a:t>•  Ambas cosas. Está reflejada en el acuerdo del proveedor y define técnicamente qué controles quedan de tu lado; en una brecha por misconfiguration la responsabilidad legal suele ser del cliente.</a:t>
-            </a:r>
-          </a:p>
-          <a:p>
-            <a:pPr>
-              <a:spcAft>
-                <a:spcPts val="600"/>
-              </a:spcAft>
-            </a:pPr>
-            <a:r>
-              <a:rPr sz="1500">
-                <a:solidFill>
-                  <a:srgbClr val="22282E"/>
-                </a:solidFill>
-              </a:rPr>
-              <a:t>•  ❓ ¿En SaaS ya no tengo nada que asegurar?</a:t>
-            </a:r>
-          </a:p>
-          <a:p>
-            <a:pPr>
-              <a:spcAft>
-                <a:spcPts val="600"/>
-              </a:spcAft>
-            </a:pPr>
-            <a:r>
-              <a:rPr sz="1500">
-                <a:solidFill>
-                  <a:srgbClr val="22282E"/>
-                </a:solidFill>
-              </a:rPr>
-              <a:t>•  Sí lo tienes: identidades, permisos, configuración de la app y los datos que subes. La mayoría de incidentes SaaS son por cuentas mal protegidas o permisos excesivos.</a:t>
-            </a:r>
-          </a:p>
-          <a:p>
-            <a:pPr>
-              <a:spcAft>
-                <a:spcPts val="600"/>
-              </a:spcAft>
-            </a:pPr>
-            <a:r>
-              <a:rPr sz="1500">
-                <a:solidFill>
-                  <a:srgbClr val="22282E"/>
-                </a:solidFill>
-              </a:rPr>
-              <a:t>•  ❓ ¿Por qué se dice que "la identidad es el nuevo perímetro"?</a:t>
-            </a:r>
-          </a:p>
-          <a:p>
-            <a:pPr>
-              <a:spcAft>
-                <a:spcPts val="600"/>
-              </a:spcAft>
-            </a:pPr>
-            <a:r>
-              <a:rPr sz="1500">
-                <a:solidFill>
-                  <a:srgbClr val="22282E"/>
-                </a:solidFill>
-              </a:rPr>
-              <a:t>•  Porque no hay un firewall físico entre tú y el mundo: cualquiera con credenciales válidas puede llamar a la API. Controlar quién puede hacer qué (IAM) es el control central.</a:t>
+              <a:t>•  Dibuja el diagrama de responsabilidad compartida para IaaS, PaaS y SaaS lado a lado.</a:t>
+            </a:r>
+          </a:p>
+          <a:p>
+            <a:pPr>
+              <a:spcAft>
+                <a:spcPts val="600"/>
+              </a:spcAft>
+            </a:pPr>
+            <a:r>
+              <a:rPr sz="1500">
+                <a:solidFill>
+                  <a:srgbClr val="22282E"/>
+                </a:solidFill>
+              </a:rPr>
+              <a:t>•  Clasifica 10 servicios reales de tu proveedor favorito según el modelo que representan.</a:t>
+            </a:r>
+          </a:p>
+          <a:p>
+            <a:pPr>
+              <a:spcAft>
+                <a:spcPts val="600"/>
+              </a:spcAft>
+            </a:pPr>
+            <a:r>
+              <a:rPr sz="1500">
+                <a:solidFill>
+                  <a:srgbClr val="22282E"/>
+                </a:solidFill>
+              </a:rPr>
+              <a:t>•  Enumera cinco categorías de misconfiguration y asocia a cada una un control preventivo.</a:t>
+            </a:r>
+          </a:p>
+          <a:p>
+            <a:pPr>
+              <a:spcAft>
+                <a:spcPts val="600"/>
+              </a:spcAft>
+            </a:pPr>
+            <a:r>
+              <a:rPr sz="1500">
+                <a:solidFill>
+                  <a:srgbClr val="22282E"/>
+                </a:solidFill>
+              </a:rPr>
+              <a:t>•  Explica con un ejemplo por qué "el proveedor es seguro" no implica "mi cuenta es segura".</a:t>
+            </a:r>
+          </a:p>
+          <a:p>
+            <a:pPr>
+              <a:spcAft>
+                <a:spcPts val="600"/>
+              </a:spcAft>
+            </a:pPr>
+            <a:r>
+              <a:rPr sz="1500">
+                <a:solidFill>
+                  <a:srgbClr val="22282E"/>
+                </a:solidFill>
+              </a:rPr>
+              <a:t>•  Diseña un esquema de múltiples cuentas para separar producción de desarrollo y justifica el blast radius reducido.</a:t>
+            </a:r>
+          </a:p>
+          <a:p>
+            <a:pPr>
+              <a:spcAft>
+                <a:spcPts val="600"/>
+              </a:spcAft>
+            </a:pPr>
+            <a:r>
+              <a:rPr sz="1500">
+                <a:solidFill>
+                  <a:srgbClr val="22282E"/>
+                </a:solidFill>
+              </a:rPr>
+              <a:t>•  Redacta una política interna de una página sobre uso de la cuenta raíz.</a:t>
             </a:r>
           </a:p>
         </p:txBody>
@@ -3511,7 +3545,7 @@
                   <a:srgbClr val="0B3D2E"/>
                 </a:solidFill>
               </a:rPr>
-              <a:t>🔗 Referencias</a:t>
+              <a:t>📝 Reto verificable</a:t>
             </a:r>
           </a:p>
         </p:txBody>
@@ -3549,71 +3583,608 @@
                   <a:srgbClr val="22282E"/>
                 </a:solidFill>
               </a:rPr>
-              <a:t>•  AWS Shared Responsibility Model. &lt;https://aws.amazon.com/compliance/shared-responsibility-model/&gt;</a:t>
-            </a:r>
-          </a:p>
-          <a:p>
-            <a:pPr>
-              <a:spcAft>
-                <a:spcPts val="600"/>
-              </a:spcAft>
-            </a:pPr>
-            <a:r>
-              <a:rPr sz="1500">
-                <a:solidFill>
-                  <a:srgbClr val="22282E"/>
-                </a:solidFill>
-              </a:rPr>
-              <a:t>•  AWS Well-Architected — Security Pillar. &lt;https://docs.aws.amazon.com/wellarchitected/latest/security-pillar/welcome.html&gt;</a:t>
-            </a:r>
-          </a:p>
-          <a:p>
-            <a:pPr>
-              <a:spcAft>
-                <a:spcPts val="600"/>
-              </a:spcAft>
-            </a:pPr>
-            <a:r>
-              <a:rPr sz="1500">
-                <a:solidFill>
-                  <a:srgbClr val="22282E"/>
-                </a:solidFill>
-              </a:rPr>
-              <a:t>•  Microsoft — Shared responsibility in the cloud. &lt;https://learn.microsoft.com/azure/security/fundamentals/shared-responsibility&gt;</a:t>
-            </a:r>
-          </a:p>
-          <a:p>
-            <a:pPr>
-              <a:spcAft>
-                <a:spcPts val="600"/>
-              </a:spcAft>
-            </a:pPr>
-            <a:r>
-              <a:rPr sz="1500">
-                <a:solidFill>
-                  <a:srgbClr val="22282E"/>
-                </a:solidFill>
-              </a:rPr>
-              <a:t>•  Google Cloud — Shared responsibility and shared fate. &lt;https://cloud.google.com/architecture/framework/security/shared-responsibility-shared-fate&gt;</a:t>
-            </a:r>
-          </a:p>
-          <a:p>
-            <a:pPr>
-              <a:spcAft>
-                <a:spcPts val="600"/>
-              </a:spcAft>
-            </a:pPr>
-            <a:r>
-              <a:rPr sz="1500">
-                <a:solidFill>
-                  <a:srgbClr val="22282E"/>
-                </a:solidFill>
-              </a:rPr>
-              <a:t>•  NIST SP 800-145, The NIST Definition of Cloud Computing. &lt;https://csrc.nist.gov/pubs/sp/800/145/final&gt;</a:t>
-            </a:r>
-          </a:p>
-        </p:txBody>
-      </p:sp>
+              <a:t>•  Elabora una matriz de responsabilidad compartida en formato tabla para una arquitectura de tres</a:t>
+            </a:r>
+          </a:p>
+          <a:p>
+            <a:pPr>
+              <a:spcAft>
+                <a:spcPts val="600"/>
+              </a:spcAft>
+            </a:pPr>
+            <a:r>
+              <a:rPr sz="1500">
+                <a:solidFill>
+                  <a:srgbClr val="22282E"/>
+                </a:solidFill>
+              </a:rPr>
+              <a:t>•  capas (balanceador gestionado + contenedores + base de datos gestionada) en el proveedor que elijas.</a:t>
+            </a:r>
+          </a:p>
+          <a:p>
+            <a:pPr>
+              <a:spcAft>
+                <a:spcPts val="600"/>
+              </a:spcAft>
+            </a:pPr>
+            <a:r>
+              <a:rPr sz="1500">
+                <a:solidFill>
+                  <a:srgbClr val="22282E"/>
+                </a:solidFill>
+              </a:rPr>
+              <a:t>•  Criterio de aceptación: cada componente lista al menos seis capas, cada capa tiene asignado</a:t>
+            </a:r>
+          </a:p>
+          <a:p>
+            <a:pPr>
+              <a:spcAft>
+                <a:spcPts val="600"/>
+              </a:spcAft>
+            </a:pPr>
+            <a:r>
+              <a:rPr sz="1500">
+                <a:solidFill>
+                  <a:srgbClr val="22282E"/>
+                </a:solidFill>
+              </a:rPr>
+              <a:t>•  responsable (Proveedor/Cliente/Compartida) coherente con la documentación oficial, y se incluye al</a:t>
+            </a:r>
+          </a:p>
+          <a:p>
+            <a:pPr>
+              <a:spcAft>
+                <a:spcPts val="600"/>
+              </a:spcAft>
+            </a:pPr>
+            <a:r>
+              <a:rPr sz="1500">
+                <a:solidFill>
+                  <a:srgbClr val="22282E"/>
+                </a:solidFill>
+              </a:rPr>
+              <a:t>•  menos un control concreto del cliente por componente.</a:t>
+            </a:r>
+          </a:p>
+        </p:txBody>
+      </p:sp>
+    </p:spTree>
+  </p:cSld>
+  <p:clrMapOvr>
+    <a:masterClrMapping/>
+  </p:clrMapOvr>
+</p:sld>
+</file>
+
+<file path=ppt/slides/slide13.xml><?xml version="1.0" encoding="utf-8"?>
+<p:sld xmlns:a="http://schemas.openxmlformats.org/drawingml/2006/main" xmlns:p="http://schemas.openxmlformats.org/presentationml/2006/main" xmlns:r="http://schemas.openxmlformats.org/officeDocument/2006/relationships">
+  <p:cSld>
+    <p:spTree>
+      <p:nvGrpSpPr>
+        <p:cNvPr id="1" name=""/>
+        <p:cNvGrpSpPr/>
+        <p:nvPr/>
+      </p:nvGrpSpPr>
+      <p:grpSpPr/>
+      <p:sp>
+        <p:nvSpPr>
+          <p:cNvPr id="2" name="TextBox 1"/>
+          <p:cNvSpPr txBox="1"/>
+          <p:nvPr/>
+        </p:nvSpPr>
+        <p:spPr>
+          <a:xfrm>
+            <a:off x="457200" y="320040"/>
+            <a:ext cx="8229600" cy="822960"/>
+          </a:xfrm>
+          <a:prstGeom prst="rect">
+            <a:avLst/>
+          </a:prstGeom>
+          <a:noFill/>
+        </p:spPr>
+        <p:txBody>
+          <a:bodyPr wrap="square">
+            <a:spAutoFit/>
+          </a:bodyPr>
+          <a:lstStyle/>
+          <a:p>
+            <a:r>
+              <a:rPr sz="2600" b="1">
+                <a:solidFill>
+                  <a:srgbClr val="0B3D2E"/>
+                </a:solidFill>
+              </a:rPr>
+              <a:t>⚠️ Errores comunes</a:t>
+            </a:r>
+          </a:p>
+        </p:txBody>
+      </p:sp>
+      <p:sp>
+        <p:nvSpPr>
+          <p:cNvPr id="3" name="TextBox 2"/>
+          <p:cNvSpPr txBox="1"/>
+          <p:nvPr/>
+        </p:nvSpPr>
+        <p:spPr>
+          <a:xfrm>
+            <a:off x="457200" y="1280160"/>
+            <a:ext cx="8229600" cy="4937760"/>
+          </a:xfrm>
+          <a:prstGeom prst="rect">
+            <a:avLst/>
+          </a:prstGeom>
+          <a:noFill/>
+        </p:spPr>
+        <p:txBody>
+          <a:bodyPr wrap="square">
+            <a:spAutoFit/>
+          </a:bodyPr>
+          <a:lstStyle/>
+          <a:p>
+            <a:pPr>
+              <a:spcAft>
+                <a:spcPts val="600"/>
+              </a:spcAft>
+            </a:pPr>
+            <a:r>
+              <a:rPr sz="1500">
+                <a:solidFill>
+                  <a:srgbClr val="22282E"/>
+                </a:solidFill>
+              </a:rPr>
+              <a:t>•  "El proveedor ya me protege, no necesito hacer nada" — Confunde operación del servicio con configuración y gobierno del cliente. Construye la matriz por tarea y contrato.</a:t>
+            </a:r>
+          </a:p>
+          <a:p>
+            <a:pPr>
+              <a:spcAft>
+                <a:spcPts val="600"/>
+              </a:spcAft>
+            </a:pPr>
+            <a:r>
+              <a:rPr sz="1500">
+                <a:solidFill>
+                  <a:srgbClr val="22282E"/>
+                </a:solidFill>
+              </a:rPr>
+              <a:t>•  Bucket o blob accesible públicamente sin querer — ACL/política heredada o pública por defecto en versiones antiguas; activa block public access.</a:t>
+            </a:r>
+          </a:p>
+          <a:p>
+            <a:pPr>
+              <a:spcAft>
+                <a:spcPts val="600"/>
+              </a:spcAft>
+            </a:pPr>
+            <a:r>
+              <a:rPr sz="1500">
+                <a:solidFill>
+                  <a:srgbClr val="22282E"/>
+                </a:solidFill>
+              </a:rPr>
+              <a:t>•  Uso diario de la cuenta raíz — Rompe el privilegio mínimo; crea usuarios/roles y guarda la raíz solo para tareas críticas con MFA.</a:t>
+            </a:r>
+          </a:p>
+          <a:p>
+            <a:pPr>
+              <a:spcAft>
+                <a:spcPts val="600"/>
+              </a:spcAft>
+            </a:pPr>
+            <a:r>
+              <a:rPr sz="1500">
+                <a:solidFill>
+                  <a:srgbClr val="22282E"/>
+                </a:solidFill>
+              </a:rPr>
+              <a:t>•  Datos en región equivocada — Se ignoró soberanía/latencia; define región por diseño y bloquea otras con SCP/policies.</a:t>
+            </a:r>
+          </a:p>
+          <a:p>
+            <a:pPr>
+              <a:spcAft>
+                <a:spcPts val="600"/>
+              </a:spcAft>
+            </a:pPr>
+            <a:r>
+              <a:rPr sz="1500">
+                <a:solidFill>
+                  <a:srgbClr val="22282E"/>
+                </a:solidFill>
+              </a:rPr>
+              <a:t>•  "No sé qué recursos tengo" — Falta de inventario; habilita Config/Asset Inventory desde el día uno.</a:t>
+            </a:r>
+          </a:p>
+        </p:txBody>
+      </p:sp>
+    </p:spTree>
+  </p:cSld>
+  <p:clrMapOvr>
+    <a:masterClrMapping/>
+  </p:clrMapOvr>
+</p:sld>
+</file>
+
+<file path=ppt/slides/slide14.xml><?xml version="1.0" encoding="utf-8"?>
+<p:sld xmlns:a="http://schemas.openxmlformats.org/drawingml/2006/main" xmlns:p="http://schemas.openxmlformats.org/presentationml/2006/main" xmlns:r="http://schemas.openxmlformats.org/officeDocument/2006/relationships">
+  <p:cSld>
+    <p:spTree>
+      <p:nvGrpSpPr>
+        <p:cNvPr id="1" name=""/>
+        <p:cNvGrpSpPr/>
+        <p:nvPr/>
+      </p:nvGrpSpPr>
+      <p:grpSpPr/>
+      <p:sp>
+        <p:nvSpPr>
+          <p:cNvPr id="2" name="TextBox 1"/>
+          <p:cNvSpPr txBox="1"/>
+          <p:nvPr/>
+        </p:nvSpPr>
+        <p:spPr>
+          <a:xfrm>
+            <a:off x="457200" y="320040"/>
+            <a:ext cx="8229600" cy="822960"/>
+          </a:xfrm>
+          <a:prstGeom prst="rect">
+            <a:avLst/>
+          </a:prstGeom>
+          <a:noFill/>
+        </p:spPr>
+        <p:txBody>
+          <a:bodyPr wrap="square">
+            <a:spAutoFit/>
+          </a:bodyPr>
+          <a:lstStyle/>
+          <a:p>
+            <a:r>
+              <a:rPr sz="2600" b="1">
+                <a:solidFill>
+                  <a:srgbClr val="0B3D2E"/>
+                </a:solidFill>
+              </a:rPr>
+              <a:t>❓ Preguntas frecuentes</a:t>
+            </a:r>
+          </a:p>
+        </p:txBody>
+      </p:sp>
+      <p:sp>
+        <p:nvSpPr>
+          <p:cNvPr id="3" name="TextBox 2"/>
+          <p:cNvSpPr txBox="1"/>
+          <p:nvPr/>
+        </p:nvSpPr>
+        <p:spPr>
+          <a:xfrm>
+            <a:off x="457200" y="1280160"/>
+            <a:ext cx="8229600" cy="4937760"/>
+          </a:xfrm>
+          <a:prstGeom prst="rect">
+            <a:avLst/>
+          </a:prstGeom>
+          <a:noFill/>
+        </p:spPr>
+        <p:txBody>
+          <a:bodyPr wrap="square">
+            <a:spAutoFit/>
+          </a:bodyPr>
+          <a:lstStyle/>
+          <a:p>
+            <a:pPr>
+              <a:spcAft>
+                <a:spcPts val="600"/>
+              </a:spcAft>
+            </a:pPr>
+            <a:r>
+              <a:rPr sz="1500">
+                <a:solidFill>
+                  <a:srgbClr val="22282E"/>
+                </a:solidFill>
+              </a:rPr>
+              <a:t>•  ❓ ¿La responsabilidad compartida es un contrato legal o solo técnico?</a:t>
+            </a:r>
+          </a:p>
+          <a:p>
+            <a:pPr>
+              <a:spcAft>
+                <a:spcPts val="600"/>
+              </a:spcAft>
+            </a:pPr>
+            <a:r>
+              <a:rPr sz="1500">
+                <a:solidFill>
+                  <a:srgbClr val="22282E"/>
+                </a:solidFill>
+              </a:rPr>
+              <a:t>•  Ambas cosas. Está reflejada en el acuerdo del proveedor y define técnicamente qué controles quedan de tu lado; en una brecha por misconfiguration la responsabilidad legal suele ser del cliente.</a:t>
+            </a:r>
+          </a:p>
+          <a:p>
+            <a:pPr>
+              <a:spcAft>
+                <a:spcPts val="600"/>
+              </a:spcAft>
+            </a:pPr>
+            <a:r>
+              <a:rPr sz="1500">
+                <a:solidFill>
+                  <a:srgbClr val="22282E"/>
+                </a:solidFill>
+              </a:rPr>
+              <a:t>•  ❓ ¿En SaaS ya no tengo nada que asegurar?</a:t>
+            </a:r>
+          </a:p>
+          <a:p>
+            <a:pPr>
+              <a:spcAft>
+                <a:spcPts val="600"/>
+              </a:spcAft>
+            </a:pPr>
+            <a:r>
+              <a:rPr sz="1500">
+                <a:solidFill>
+                  <a:srgbClr val="22282E"/>
+                </a:solidFill>
+              </a:rPr>
+              <a:t>•  Sí lo tienes: identidades, permisos, configuración de la app y los datos que subes. La mayoría de incidentes SaaS son por cuentas mal protegidas o permisos excesivos.</a:t>
+            </a:r>
+          </a:p>
+          <a:p>
+            <a:pPr>
+              <a:spcAft>
+                <a:spcPts val="600"/>
+              </a:spcAft>
+            </a:pPr>
+            <a:r>
+              <a:rPr sz="1500">
+                <a:solidFill>
+                  <a:srgbClr val="22282E"/>
+                </a:solidFill>
+              </a:rPr>
+              <a:t>•  ❓ ¿Por qué se dice que "la identidad es el nuevo perímetro"?</a:t>
+            </a:r>
+          </a:p>
+          <a:p>
+            <a:pPr>
+              <a:spcAft>
+                <a:spcPts val="600"/>
+              </a:spcAft>
+            </a:pPr>
+            <a:r>
+              <a:rPr sz="1500">
+                <a:solidFill>
+                  <a:srgbClr val="22282E"/>
+                </a:solidFill>
+              </a:rPr>
+              <a:t>•  Porque no hay un firewall físico entre tú y el mundo: cualquiera con credenciales válidas puede llamar a la API. Controlar quién puede hacer qué (IAM) es el control central.</a:t>
+            </a:r>
+          </a:p>
+        </p:txBody>
+      </p:sp>
+    </p:spTree>
+  </p:cSld>
+  <p:clrMapOvr>
+    <a:masterClrMapping/>
+  </p:clrMapOvr>
+</p:sld>
+</file>
+
+<file path=ppt/slides/slide15.xml><?xml version="1.0" encoding="utf-8"?>
+<p:sld xmlns:a="http://schemas.openxmlformats.org/drawingml/2006/main" xmlns:p="http://schemas.openxmlformats.org/presentationml/2006/main" xmlns:r="http://schemas.openxmlformats.org/officeDocument/2006/relationships">
+  <p:cSld>
+    <p:spTree>
+      <p:nvGrpSpPr>
+        <p:cNvPr id="1" name=""/>
+        <p:cNvGrpSpPr/>
+        <p:nvPr/>
+      </p:nvGrpSpPr>
+      <p:grpSpPr/>
+      <p:sp>
+        <p:nvSpPr>
+          <p:cNvPr id="2" name="TextBox 1"/>
+          <p:cNvSpPr txBox="1"/>
+          <p:nvPr/>
+        </p:nvSpPr>
+        <p:spPr>
+          <a:xfrm>
+            <a:off x="457200" y="320040"/>
+            <a:ext cx="8229600" cy="822960"/>
+          </a:xfrm>
+          <a:prstGeom prst="rect">
+            <a:avLst/>
+          </a:prstGeom>
+          <a:noFill/>
+        </p:spPr>
+        <p:txBody>
+          <a:bodyPr wrap="square">
+            <a:spAutoFit/>
+          </a:bodyPr>
+          <a:lstStyle/>
+          <a:p>
+            <a:r>
+              <a:rPr sz="2600" b="1">
+                <a:solidFill>
+                  <a:srgbClr val="0B3D2E"/>
+                </a:solidFill>
+              </a:rPr>
+              <a:t>🔗 Referencias verificables y alcance</a:t>
+            </a:r>
+          </a:p>
+        </p:txBody>
+      </p:sp>
+      <p:sp>
+        <p:nvSpPr>
+          <p:cNvPr id="3" name="TextBox 2"/>
+          <p:cNvSpPr txBox="1"/>
+          <p:nvPr/>
+        </p:nvSpPr>
+        <p:spPr>
+          <a:xfrm>
+            <a:off x="457200" y="1280160"/>
+            <a:ext cx="8229600" cy="4937760"/>
+          </a:xfrm>
+          <a:prstGeom prst="rect">
+            <a:avLst/>
+          </a:prstGeom>
+          <a:noFill/>
+        </p:spPr>
+        <p:txBody>
+          <a:bodyPr wrap="square">
+            <a:spAutoFit/>
+          </a:bodyPr>
+          <a:lstStyle/>
+          <a:p>
+            <a:pPr>
+              <a:spcAft>
+                <a:spcPts val="600"/>
+              </a:spcAft>
+            </a:pPr>
+            <a:r>
+              <a:rPr sz="1500">
+                <a:solidFill>
+                  <a:srgbClr val="22282E"/>
+                </a:solidFill>
+              </a:rPr>
+              <a:t>•  AWS Shared Responsibility Model. &lt;https://aws.amazon.com/compliance/shared-responsibility-model/&gt; — explicación oficial AWS; la división se concreta por servicio.</a:t>
+            </a:r>
+          </a:p>
+          <a:p>
+            <a:pPr>
+              <a:spcAft>
+                <a:spcPts val="600"/>
+              </a:spcAft>
+            </a:pPr>
+            <a:r>
+              <a:rPr sz="1500">
+                <a:solidFill>
+                  <a:srgbClr val="22282E"/>
+                </a:solidFill>
+              </a:rPr>
+              <a:t>•  Microsoft — Shared responsibility in the cloud. &lt;https://learn.microsoft.com/en-us/azure/security/fundamentals/shared-responsibility&gt; — matriz oficial actualizada para IaaS, PaaS y SaaS.</a:t>
+            </a:r>
+          </a:p>
+          <a:p>
+            <a:pPr>
+              <a:spcAft>
+                <a:spcPts val="600"/>
+              </a:spcAft>
+            </a:pPr>
+            <a:r>
+              <a:rPr sz="1500">
+                <a:solidFill>
+                  <a:srgbClr val="22282E"/>
+                </a:solidFill>
+              </a:rPr>
+              <a:t>•  Google Cloud — Shared responsibility and shared fate. &lt;https://cloud.google.com/architecture/framework/security/shared-responsibility-shared-fate&gt; — perspectiva oficial Google; no modifica las…</a:t>
+            </a:r>
+          </a:p>
+          <a:p>
+            <a:pPr>
+              <a:spcAft>
+                <a:spcPts val="600"/>
+              </a:spcAft>
+            </a:pPr>
+            <a:r>
+              <a:rPr sz="1500">
+                <a:solidFill>
+                  <a:srgbClr val="22282E"/>
+                </a:solidFill>
+              </a:rPr>
+              <a:t>•  NIST SP 800-145. &lt;https://doi.org/10.6028/NIST.SP.800-145&gt; — definición neutral de características, modelos de servicio y despliegue cloud.</a:t>
+            </a:r>
+          </a:p>
+          <a:p>
+            <a:pPr>
+              <a:spcAft>
+                <a:spcPts val="600"/>
+              </a:spcAft>
+            </a:pPr>
+            <a:r>
+              <a:rPr sz="1500">
+                <a:solidFill>
+                  <a:srgbClr val="22282E"/>
+                </a:solidFill>
+              </a:rPr>
+              <a:t>•  AWS Well-Architected — Security Pillar. &lt;https://docs.aws.amazon.com/wellarchitected/latest/security-pillar/welcome.html&gt; — principios de diseño; debe aplicarse a arquitectura y requisitos concretos.</a:t>
+            </a:r>
+          </a:p>
+        </p:txBody>
+      </p:sp>
+    </p:spTree>
+  </p:cSld>
+  <p:clrMapOvr>
+    <a:masterClrMapping/>
+  </p:clrMapOvr>
+</p:sld>
+</file>
+
+<file path=ppt/slides/slide16.xml><?xml version="1.0" encoding="utf-8"?>
+<p:sld xmlns:a="http://schemas.openxmlformats.org/drawingml/2006/main" xmlns:p="http://schemas.openxmlformats.org/presentationml/2006/main" xmlns:r="http://schemas.openxmlformats.org/officeDocument/2006/relationships">
+  <p:cSld>
+    <p:spTree>
+      <p:nvGrpSpPr>
+        <p:cNvPr id="1" name=""/>
+        <p:cNvGrpSpPr/>
+        <p:nvPr/>
+      </p:nvGrpSpPr>
+      <p:grpSpPr/>
+      <p:sp>
+        <p:nvSpPr>
+          <p:cNvPr id="2" name="TextBox 1"/>
+          <p:cNvSpPr txBox="1"/>
+          <p:nvPr/>
+        </p:nvSpPr>
+        <p:spPr>
+          <a:xfrm>
+            <a:off x="457200" y="274320"/>
+            <a:ext cx="8229600" cy="640080"/>
+          </a:xfrm>
+          <a:prstGeom prst="rect">
+            <a:avLst/>
+          </a:prstGeom>
+          <a:noFill/>
+        </p:spPr>
+        <p:txBody>
+          <a:bodyPr wrap="square">
+            <a:spAutoFit/>
+          </a:bodyPr>
+          <a:lstStyle/>
+          <a:p>
+            <a:r>
+              <a:rPr sz="2200" b="1">
+                <a:solidFill>
+                  <a:srgbClr val="0B3D2E"/>
+                </a:solidFill>
+              </a:rPr>
+              <a:t>Diagrama de la clase</a:t>
+            </a:r>
+          </a:p>
+        </p:txBody>
+      </p:sp>
+      <p:pic>
+        <p:nvPicPr>
+          <p:cNvPr id="3" name="Picture 2" descr="79abe94fa2aae323.png"/>
+          <p:cNvPicPr>
+            <a:picLocks noChangeAspect="1"/>
+          </p:cNvPicPr>
+          <p:nvPr/>
+        </p:nvPicPr>
+        <p:blipFill>
+          <a:blip r:embed="rId2"/>
+          <a:stretch>
+            <a:fillRect/>
+          </a:stretch>
+        </p:blipFill>
+        <p:spPr>
+          <a:xfrm>
+            <a:off x="457200" y="2871216"/>
+            <a:ext cx="8229600" cy="1755648"/>
+          </a:xfrm>
+          <a:prstGeom prst="rect">
+            <a:avLst/>
+          </a:prstGeom>
+        </p:spPr>
+      </p:pic>
     </p:spTree>
   </p:cSld>
   <p:clrMapOvr>
@@ -3743,7 +4314,7 @@
                   <a:srgbClr val="22282E"/>
                 </a:solidFill>
               </a:rPr>
-              <a:t>•  configuración del cliente que causan la mayoría de las brechas cloud.</a:t>
+              <a:t>•  configuración del cliente que pueden exponer datos, identidades y servicios.</a:t>
             </a:r>
           </a:p>
         </p:txBody>
@@ -4041,22 +4612,22 @@
                   <a:srgbClr val="22282E"/>
                 </a:solidFill>
               </a:rPr>
-              <a:t>•  4 — Misconfiguration como causa raíz</a:t>
-            </a:r>
-          </a:p>
-          <a:p>
-            <a:pPr>
-              <a:spcAft>
-                <a:spcPts val="600"/>
-              </a:spcAft>
-            </a:pPr>
-            <a:r>
-              <a:rPr sz="1500">
-                <a:solidFill>
-                  <a:srgbClr val="22282E"/>
-                </a:solidFill>
-              </a:rPr>
-              <a:t>•  5 — Perímetro definido por identidad</a:t>
+              <a:t>•  4 — Configuración insegura y estado efectivo</a:t>
+            </a:r>
+          </a:p>
+          <a:p>
+            <a:pPr>
+              <a:spcAft>
+                <a:spcPts val="600"/>
+              </a:spcAft>
+            </a:pPr>
+            <a:r>
+              <a:rPr sz="1500">
+                <a:solidFill>
+                  <a:srgbClr val="22282E"/>
+                </a:solidFill>
+              </a:rPr>
+              <a:t>•  5 — Identidad, red y datos como controles compuestos</a:t>
             </a:r>
           </a:p>
           <a:p>
@@ -4137,7 +4708,7 @@
                   <a:srgbClr val="0B3D2E"/>
                 </a:solidFill>
               </a:rPr>
-              <a:t>📖 Definiciones y características</a:t>
+              <a:t>🧠 Explicación en profundidad</a:t>
             </a:r>
           </a:p>
         </p:txBody>
@@ -4175,97 +4746,67 @@
                   <a:srgbClr val="22282E"/>
                 </a:solidFill>
               </a:rPr>
-              <a:t>•  Responsabilidad compartida: modelo donde el proveedor asegura la infraestructura subyacente y el cliente asegura lo que despliega encima. Característica clave: la línea divisoria depende del servicio contratado.</a:t>
-            </a:r>
-          </a:p>
-          <a:p>
-            <a:pPr>
-              <a:spcAft>
-                <a:spcPts val="600"/>
-              </a:spcAft>
-            </a:pPr>
-            <a:r>
-              <a:rPr sz="1500">
-                <a:solidFill>
-                  <a:srgbClr val="22282E"/>
-                </a:solidFill>
-              </a:rPr>
-              <a:t>•  IaaS (Infrastructure as a Service): el proveedor da cómputo, red y almacenamiento virtualizados (p. ej. EC2). Clave: el cliente asegura SO, parches, red y aplicación.</a:t>
-            </a:r>
-          </a:p>
-          <a:p>
-            <a:pPr>
-              <a:spcAft>
-                <a:spcPts val="600"/>
-              </a:spcAft>
-            </a:pPr>
-            <a:r>
-              <a:rPr sz="1500">
-                <a:solidFill>
-                  <a:srgbClr val="22282E"/>
-                </a:solidFill>
-              </a:rPr>
-              <a:t>•  PaaS (Platform as a Service): el proveedor gestiona también el runtime y el SO (p. ej. App Engine, RDS). Clave: el cliente asegura datos, configuración y accesos.</a:t>
-            </a:r>
-          </a:p>
-          <a:p>
-            <a:pPr>
-              <a:spcAft>
-                <a:spcPts val="600"/>
-              </a:spcAft>
-            </a:pPr>
-            <a:r>
-              <a:rPr sz="1500">
-                <a:solidFill>
-                  <a:srgbClr val="22282E"/>
-                </a:solidFill>
-              </a:rPr>
-              <a:t>•  SaaS (Software as a Service): el proveedor gestiona casi todo (p. ej. Microsoft 365). Clave: el cliente solo asegura datos, identidades y configuración de la app.</a:t>
-            </a:r>
-          </a:p>
-          <a:p>
-            <a:pPr>
-              <a:spcAft>
-                <a:spcPts val="600"/>
-              </a:spcAft>
-            </a:pPr>
-            <a:r>
-              <a:rPr sz="1500">
-                <a:solidFill>
-                  <a:srgbClr val="22282E"/>
-                </a:solidFill>
-              </a:rPr>
-              <a:t>•  Plano de control (control plane): las APIs de gestión del proveedor. Clave: comprometerlo da control total; se protege con IAM y MFA.</a:t>
-            </a:r>
-          </a:p>
-          <a:p>
-            <a:pPr>
-              <a:spcAft>
-                <a:spcPts val="600"/>
-              </a:spcAft>
-            </a:pPr>
-            <a:r>
-              <a:rPr sz="1500">
-                <a:solidFill>
-                  <a:srgbClr val="22282E"/>
-                </a:solidFill>
-              </a:rPr>
-              <a:t>•  Misconfiguration: ajuste inseguro dejado por el cliente (bucket público, puerto abierto). Clave: invisible para el proveedor, es el vector dominante.</a:t>
-            </a:r>
-          </a:p>
-          <a:p>
-            <a:pPr>
-              <a:spcAft>
-                <a:spcPts val="600"/>
-              </a:spcAft>
-            </a:pPr>
-            <a:r>
-              <a:rPr sz="1500">
-                <a:solidFill>
-                  <a:srgbClr val="22282E"/>
-                </a:solidFill>
-              </a:rPr>
-              <a:t>•  Blast radius: alcance del daño si un recurso se compromete. Clave: se limita con segmentación de cuentas, VPCs y privilegio mínimo.</a:t>
+              <a:t>•  La nube combina recursos virtualizados, servicios administrados y automatización por API. NIST SP 800-145 define características y modelos de servicio, pero esa taxonomía no decide quién configura…</a:t>
+            </a:r>
+          </a:p>
+          <a:p>
+            <a:pPr>
+              <a:spcAft>
+                <a:spcPts val="600"/>
+              </a:spcAft>
+            </a:pPr>
+            <a:r>
+              <a:rPr sz="1500">
+                <a:solidFill>
+                  <a:srgbClr val="22282E"/>
+                </a:solidFill>
+              </a:rPr>
+              <a:t>•  El diagrama no presenta una línea fija: obliga a clasificar tareas. En IaaS el proveedor opera instalaciones y virtualización, mientras el cliente suele administrar sistema invitado, aplicaciones…</a:t>
+            </a:r>
+          </a:p>
+          <a:p>
+            <a:pPr>
+              <a:spcAft>
+                <a:spcPts val="600"/>
+              </a:spcAft>
+            </a:pPr>
+            <a:r>
+              <a:rPr sz="1500">
+                <a:solidFill>
+                  <a:srgbClr val="22282E"/>
+                </a:solidFill>
+              </a:rPr>
+              <a:t>•  La distinción popular ayuda a empezar, pero puede ocultar dependencias. El proveedor protege la infraestructura del servicio y publica capacidades; el cliente debe activarlas y operar sus controles.…</a:t>
+            </a:r>
+          </a:p>
+          <a:p>
+            <a:pPr>
+              <a:spcAft>
+                <a:spcPts val="600"/>
+              </a:spcAft>
+            </a:pPr>
+            <a:r>
+              <a:rPr sz="1500">
+                <a:solidFill>
+                  <a:srgbClr val="22282E"/>
+                </a:solidFill>
+              </a:rPr>
+              <a:t>•  El plano de control crea, cambia o elimina recursos; el plano de datos procesa contenido; el plano de identidad emite y evalúa sesiones. Una acción administrativa puede venir desde Internet sin…</a:t>
+            </a:r>
+          </a:p>
+          <a:p>
+            <a:pPr>
+              <a:spcAft>
+                <a:spcPts val="600"/>
+              </a:spcAft>
+            </a:pPr>
+            <a:r>
+              <a:rPr sz="1500">
+                <a:solidFill>
+                  <a:srgbClr val="22282E"/>
+                </a:solidFill>
+              </a:rPr>
+              <a:t>•  Región describe una ubicación geográfica ofrecida por el proveedor; zonas dentro de ella aportan dominios de fallo separados según el servicio. Desplegar en dos zonas mejora tolerancia a ciertos…</a:t>
             </a:r>
           </a:p>
         </p:txBody>
@@ -4316,7 +4857,7 @@
                   <a:srgbClr val="0B3D2E"/>
                 </a:solidFill>
               </a:rPr>
-              <a:t>🧰 Herramientas y preparación</a:t>
+              <a:t>📖 Definiciones y características</a:t>
             </a:r>
           </a:p>
         </p:txBody>
@@ -4354,82 +4895,97 @@
                   <a:srgbClr val="22282E"/>
                 </a:solidFill>
               </a:rPr>
-              <a:t>•  Cuenta gratuita en al menos un proveedor (AWS Free Tier, Azure free account o GCP free tier). No subas datos reales; usa una cuenta de laboratorio dedicada.</a:t>
-            </a:r>
-          </a:p>
-          <a:p>
-            <a:pPr>
-              <a:spcAft>
-                <a:spcPts val="600"/>
-              </a:spcAft>
-            </a:pPr>
-            <a:r>
-              <a:rPr sz="1500">
-                <a:solidFill>
-                  <a:srgbClr val="22282E"/>
-                </a:solidFill>
-              </a:rPr>
-              <a:t>•  CLIs oficiales instaladas: aws, az, gcloud.</a:t>
-            </a:r>
-          </a:p>
-          <a:p>
-            <a:pPr>
-              <a:spcAft>
-                <a:spcPts val="600"/>
-              </a:spcAft>
-            </a:pPr>
-            <a:r>
-              <a:rPr sz="1500">
-                <a:solidFill>
-                  <a:srgbClr val="22282E"/>
-                </a:solidFill>
-              </a:rPr>
-              <a:t>•  Habilita MFA en la cuenta raíz/administrador antes de cualquier práctica.</a:t>
-            </a:r>
-          </a:p>
-          <a:p>
-            <a:pPr>
-              <a:spcAft>
-                <a:spcPts val="600"/>
-              </a:spcAft>
-            </a:pPr>
-            <a:r>
-              <a:rPr sz="1500">
-                <a:solidFill>
-                  <a:srgbClr val="22282E"/>
-                </a:solidFill>
-              </a:rPr>
-              <a:t>•  aws --version</a:t>
-            </a:r>
-          </a:p>
-          <a:p>
-            <a:pPr>
-              <a:spcAft>
-                <a:spcPts val="600"/>
-              </a:spcAft>
-            </a:pPr>
-            <a:r>
-              <a:rPr sz="1500">
-                <a:solidFill>
-                  <a:srgbClr val="22282E"/>
-                </a:solidFill>
-              </a:rPr>
-              <a:t>•  az version</a:t>
-            </a:r>
-          </a:p>
-          <a:p>
-            <a:pPr>
-              <a:spcAft>
-                <a:spcPts val="600"/>
-              </a:spcAft>
-            </a:pPr>
-            <a:r>
-              <a:rPr sz="1500">
-                <a:solidFill>
-                  <a:srgbClr val="22282E"/>
-                </a:solidFill>
-              </a:rPr>
-              <a:t>•  gcloud version</a:t>
+              <a:t>•  Responsabilidad compartida: modelo donde el proveedor asegura la infraestructura subyacente y el cliente asegura lo que despliega encima. Característica clave: la línea divisoria depende del servicio…</a:t>
+            </a:r>
+          </a:p>
+          <a:p>
+            <a:pPr>
+              <a:spcAft>
+                <a:spcPts val="600"/>
+              </a:spcAft>
+            </a:pPr>
+            <a:r>
+              <a:rPr sz="1500">
+                <a:solidFill>
+                  <a:srgbClr val="22282E"/>
+                </a:solidFill>
+              </a:rPr>
+              <a:t>•  IaaS (Infrastructure as a Service): el proveedor da cómputo, red y almacenamiento virtualizados (p. ej. EC2). Clave: el cliente asegura SO, parches, red y aplicación.</a:t>
+            </a:r>
+          </a:p>
+          <a:p>
+            <a:pPr>
+              <a:spcAft>
+                <a:spcPts val="600"/>
+              </a:spcAft>
+            </a:pPr>
+            <a:r>
+              <a:rPr sz="1500">
+                <a:solidFill>
+                  <a:srgbClr val="22282E"/>
+                </a:solidFill>
+              </a:rPr>
+              <a:t>•  PaaS (Platform as a Service): el proveedor gestiona también el runtime y el SO (p. ej. App Engine, RDS). Clave: el cliente asegura datos, configuración y accesos.</a:t>
+            </a:r>
+          </a:p>
+          <a:p>
+            <a:pPr>
+              <a:spcAft>
+                <a:spcPts val="600"/>
+              </a:spcAft>
+            </a:pPr>
+            <a:r>
+              <a:rPr sz="1500">
+                <a:solidFill>
+                  <a:srgbClr val="22282E"/>
+                </a:solidFill>
+              </a:rPr>
+              <a:t>•  SaaS (Software as a Service): el proveedor entrega una aplicación administrada. Clave: el cliente conserva responsabilidades sobre identidades, dispositivos, datos, configuración e integración según…</a:t>
+            </a:r>
+          </a:p>
+          <a:p>
+            <a:pPr>
+              <a:spcAft>
+                <a:spcPts val="600"/>
+              </a:spcAft>
+            </a:pPr>
+            <a:r>
+              <a:rPr sz="1500">
+                <a:solidFill>
+                  <a:srgbClr val="22282E"/>
+                </a:solidFill>
+              </a:rPr>
+              <a:t>•  Plano de control (control plane): APIs y mecanismos que administran recursos. Clave: el impacto de una sesión comprometida depende de permisos, límites organizacionales y controles de detección.</a:t>
+            </a:r>
+          </a:p>
+          <a:p>
+            <a:pPr>
+              <a:spcAft>
+                <a:spcPts val="600"/>
+              </a:spcAft>
+            </a:pPr>
+            <a:r>
+              <a:rPr sz="1500">
+                <a:solidFill>
+                  <a:srgbClr val="22282E"/>
+                </a:solidFill>
+              </a:rPr>
+              <a:t>•  Configuración insegura: estado efectivo que expone o debilita un recurso respecto de su requisito. Clave: puede provenir de valores por defecto, cambios manuales, IaC, herencia o excepción.</a:t>
+            </a:r>
+          </a:p>
+          <a:p>
+            <a:pPr>
+              <a:spcAft>
+                <a:spcPts val="600"/>
+              </a:spcAft>
+            </a:pPr>
+            <a:r>
+              <a:rPr sz="1500">
+                <a:solidFill>
+                  <a:srgbClr val="22282E"/>
+                </a:solidFill>
+              </a:rPr>
+              <a:t>•  Blast radius: alcance del daño si un recurso se compromete. Clave: se limita con segmentación de cuentas, VPCs y privilegio mínimo.</a:t>
             </a:r>
           </a:p>
         </p:txBody>
@@ -4480,7 +5036,7 @@
                   <a:srgbClr val="0B3D2E"/>
                 </a:solidFill>
               </a:rPr>
-              <a:t>🧪 Laboratorio guiado (ejercicio aplicado)</a:t>
+              <a:t>🔍 Caso razonado — la misma base de datos en IaaS y PaaS</a:t>
             </a:r>
           </a:p>
         </p:txBody>
@@ -4518,97 +5074,22 @@
                   <a:srgbClr val="22282E"/>
                 </a:solidFill>
               </a:rPr>
-              <a:t>•  Este es un tema conceptual: el laboratorio es un análisis de arquitectura y una matriz de responsabilidad.</a:t>
-            </a:r>
-          </a:p>
-          <a:p>
-            <a:pPr>
-              <a:spcAft>
-                <a:spcPts val="600"/>
-              </a:spcAft>
-            </a:pPr>
-            <a:r>
-              <a:rPr sz="1500">
-                <a:solidFill>
-                  <a:srgbClr val="22282E"/>
-                </a:solidFill>
-              </a:rPr>
-              <a:t>•  Elige tres servicios reales, uno por modelo: por ejemplo EC2 (IaaS), AWS Lambda (PaaS/FaaS) y Amazon S3 (almacenamiento gestionado).</a:t>
-            </a:r>
-          </a:p>
-          <a:p>
-            <a:pPr>
-              <a:spcAft>
-                <a:spcPts val="600"/>
-              </a:spcAft>
-            </a:pPr>
-            <a:r>
-              <a:rPr sz="1500">
-                <a:solidFill>
-                  <a:srgbClr val="22282E"/>
-                </a:solidFill>
-              </a:rPr>
-              <a:t>•  Para cada uno, construye una tabla con las capas: hardware físico, red, hipervisor, SO, runtime, aplicación, datos, IAM/config. Marca en cada capa quién es responsable: Proveedor, Cliente o Compartida.</a:t>
-            </a:r>
-          </a:p>
-          <a:p>
-            <a:pPr>
-              <a:spcAft>
-                <a:spcPts val="600"/>
-              </a:spcAft>
-            </a:pPr>
-            <a:r>
-              <a:rPr sz="1500">
-                <a:solidFill>
-                  <a:srgbClr val="22282E"/>
-                </a:solidFill>
-              </a:rPr>
-              <a:t>•  Investiga en la documentación oficial cómo describe el proveedor la frontera de cada servicio y contrasta con tu tabla.</a:t>
-            </a:r>
-          </a:p>
-          <a:p>
-            <a:pPr>
-              <a:spcAft>
-                <a:spcPts val="600"/>
-              </a:spcAft>
-            </a:pPr>
-            <a:r>
-              <a:rPr sz="1500">
-                <a:solidFill>
-                  <a:srgbClr val="22282E"/>
-                </a:solidFill>
-              </a:rPr>
-              <a:t>•  Toma una brecha pública real (p. ej. una fuga por bucket S3 mal configurado) e identifica en qué capa falló y de quién era la responsabilidad. Comprobarás que casi siempre fue del cliente.</a:t>
-            </a:r>
-          </a:p>
-          <a:p>
-            <a:pPr>
-              <a:spcAft>
-                <a:spcPts val="600"/>
-              </a:spcAft>
-            </a:pPr>
-            <a:r>
-              <a:rPr sz="1500">
-                <a:solidFill>
-                  <a:srgbClr val="22282E"/>
-                </a:solidFill>
-              </a:rPr>
-              <a:t>•  Redacta un párrafo de "controles mínimos del cliente" para cada uno de los tres servicios.</a:t>
-            </a:r>
-          </a:p>
-          <a:p>
-            <a:pPr>
-              <a:spcAft>
-                <a:spcPts val="600"/>
-              </a:spcAft>
-            </a:pPr>
-            <a:r>
-              <a:rPr sz="1500">
-                <a:solidFill>
-                  <a:srgbClr val="22282E"/>
-                </a:solidFill>
-              </a:rPr>
-              <a:t>•  Repite el ejercicio de la capa IAM: describe por qué en la nube el perímetro es la identidad y no la red.</a:t>
+              <a:t>•  Una organización puede instalar PostgreSQL en una VM o contratar una base administrada. En la VM controla parche, sistema, proceso, backup, red, credenciales y datos. En PaaS el proveedor asume…</a:t>
+            </a:r>
+          </a:p>
+          <a:p>
+            <a:pPr>
+              <a:spcAft>
+                <a:spcPts val="600"/>
+              </a:spcAft>
+            </a:pPr>
+            <a:r>
+              <a:rPr sz="1500">
+                <a:solidFill>
+                  <a:srgbClr val="22282E"/>
+                </a:solidFill>
+              </a:rPr>
+              <a:t>•  La matriz de evidencia cambia: en IaaS se conserva inventario y estado de parche del host; en PaaS se usa versión administrada, configuración, logs del servicio y pruebas de restauración. En ambos…</a:t>
             </a:r>
           </a:p>
         </p:txBody>
@@ -4659,7 +5140,7 @@
                   <a:srgbClr val="0B3D2E"/>
                 </a:solidFill>
               </a:rPr>
-              <a:t>✍️ Ejercicios</a:t>
+              <a:t>✅ Criterio de dominio</a:t>
             </a:r>
           </a:p>
         </p:txBody>
@@ -4697,82 +5178,7 @@
                   <a:srgbClr val="22282E"/>
                 </a:solidFill>
               </a:rPr>
-              <a:t>•  Dibuja el diagrama de responsabilidad compartida para IaaS, PaaS y SaaS lado a lado.</a:t>
-            </a:r>
-          </a:p>
-          <a:p>
-            <a:pPr>
-              <a:spcAft>
-                <a:spcPts val="600"/>
-              </a:spcAft>
-            </a:pPr>
-            <a:r>
-              <a:rPr sz="1500">
-                <a:solidFill>
-                  <a:srgbClr val="22282E"/>
-                </a:solidFill>
-              </a:rPr>
-              <a:t>•  Clasifica 10 servicios reales de tu proveedor favorito según el modelo que representan.</a:t>
-            </a:r>
-          </a:p>
-          <a:p>
-            <a:pPr>
-              <a:spcAft>
-                <a:spcPts val="600"/>
-              </a:spcAft>
-            </a:pPr>
-            <a:r>
-              <a:rPr sz="1500">
-                <a:solidFill>
-                  <a:srgbClr val="22282E"/>
-                </a:solidFill>
-              </a:rPr>
-              <a:t>•  Enumera cinco categorías de misconfiguration y asocia a cada una un control preventivo.</a:t>
-            </a:r>
-          </a:p>
-          <a:p>
-            <a:pPr>
-              <a:spcAft>
-                <a:spcPts val="600"/>
-              </a:spcAft>
-            </a:pPr>
-            <a:r>
-              <a:rPr sz="1500">
-                <a:solidFill>
-                  <a:srgbClr val="22282E"/>
-                </a:solidFill>
-              </a:rPr>
-              <a:t>•  Explica con un ejemplo por qué "el proveedor es seguro" no implica "mi cuenta es segura".</a:t>
-            </a:r>
-          </a:p>
-          <a:p>
-            <a:pPr>
-              <a:spcAft>
-                <a:spcPts val="600"/>
-              </a:spcAft>
-            </a:pPr>
-            <a:r>
-              <a:rPr sz="1500">
-                <a:solidFill>
-                  <a:srgbClr val="22282E"/>
-                </a:solidFill>
-              </a:rPr>
-              <a:t>•  Diseña un esquema de múltiples cuentas para separar producción de desarrollo y justifica el blast radius reducido.</a:t>
-            </a:r>
-          </a:p>
-          <a:p>
-            <a:pPr>
-              <a:spcAft>
-                <a:spcPts val="600"/>
-              </a:spcAft>
-            </a:pPr>
-            <a:r>
-              <a:rPr sz="1500">
-                <a:solidFill>
-                  <a:srgbClr val="22282E"/>
-                </a:solidFill>
-              </a:rPr>
-              <a:t>•  Redacta una política interna de una página sobre uso de la cuenta raíz.</a:t>
+              <a:t>•  Dominas la clase cuando puedes tomar un servicio concreto, asignar al menos diez tareas entre proveedor, cliente y compartidas, indicar una evidencia verificable para cada tarea y explicar cómo…</a:t>
             </a:r>
           </a:p>
         </p:txBody>
@@ -4823,7 +5229,7 @@
                   <a:srgbClr val="0B3D2E"/>
                 </a:solidFill>
               </a:rPr>
-              <a:t>📝 Reto verificable</a:t>
+              <a:t>🧰 Herramientas y preparación</a:t>
             </a:r>
           </a:p>
         </p:txBody>
@@ -4861,67 +5267,37 @@
                   <a:srgbClr val="22282E"/>
                 </a:solidFill>
               </a:rPr>
-              <a:t>•  Elabora una matriz de responsabilidad compartida en formato tabla para una arquitectura de tres</a:t>
-            </a:r>
-          </a:p>
-          <a:p>
-            <a:pPr>
-              <a:spcAft>
-                <a:spcPts val="600"/>
-              </a:spcAft>
-            </a:pPr>
-            <a:r>
-              <a:rPr sz="1500">
-                <a:solidFill>
-                  <a:srgbClr val="22282E"/>
-                </a:solidFill>
-              </a:rPr>
-              <a:t>•  capas (balanceador gestionado + contenedores + base de datos gestionada) en el proveedor que elijas.</a:t>
-            </a:r>
-          </a:p>
-          <a:p>
-            <a:pPr>
-              <a:spcAft>
-                <a:spcPts val="600"/>
-              </a:spcAft>
-            </a:pPr>
-            <a:r>
-              <a:rPr sz="1500">
-                <a:solidFill>
-                  <a:srgbClr val="22282E"/>
-                </a:solidFill>
-              </a:rPr>
-              <a:t>•  Criterio de aceptación: cada componente lista al menos seis capas, cada capa tiene asignado</a:t>
-            </a:r>
-          </a:p>
-          <a:p>
-            <a:pPr>
-              <a:spcAft>
-                <a:spcPts val="600"/>
-              </a:spcAft>
-            </a:pPr>
-            <a:r>
-              <a:rPr sz="1500">
-                <a:solidFill>
-                  <a:srgbClr val="22282E"/>
-                </a:solidFill>
-              </a:rPr>
-              <a:t>•  responsable (Proveedor/Cliente/Compartida) coherente con la documentación oficial, y se incluye al</a:t>
-            </a:r>
-          </a:p>
-          <a:p>
-            <a:pPr>
-              <a:spcAft>
-                <a:spcPts val="600"/>
-              </a:spcAft>
-            </a:pPr>
-            <a:r>
-              <a:rPr sz="1500">
-                <a:solidFill>
-                  <a:srgbClr val="22282E"/>
-                </a:solidFill>
-              </a:rPr>
-              <a:t>•  menos un control concreto del cliente por componente.</a:t>
+              <a:t>•  Cuenta gratuita en al menos un proveedor (AWS Free Tier, Azure free account o GCP free tier). No subas datos reales; usa una cuenta de laboratorio dedicada.</a:t>
+            </a:r>
+          </a:p>
+          <a:p>
+            <a:pPr>
+              <a:spcAft>
+                <a:spcPts val="600"/>
+              </a:spcAft>
+            </a:pPr>
+            <a:r>
+              <a:rPr sz="1500">
+                <a:solidFill>
+                  <a:srgbClr val="22282E"/>
+                </a:solidFill>
+              </a:rPr>
+              <a:t>•  CLIs oficiales instaladas: aws, az, gcloud.</a:t>
+            </a:r>
+          </a:p>
+          <a:p>
+            <a:pPr>
+              <a:spcAft>
+                <a:spcPts val="600"/>
+              </a:spcAft>
+            </a:pPr>
+            <a:r>
+              <a:rPr sz="1500">
+                <a:solidFill>
+                  <a:srgbClr val="22282E"/>
+                </a:solidFill>
+              </a:rPr>
+              <a:t>•  Habilita MFA en la cuenta raíz/administrador antes de cualquier práctica.</a:t>
             </a:r>
           </a:p>
         </p:txBody>
